--- a/media/resources/files/Onduktar_Akcha_Kabarchy.pptx
+++ b/media/resources/files/Onduktar_Akcha_Kabarchy.pptx
@@ -29698,7 +29698,7 @@
                 <a:ea typeface="+mn-ea"/>
                 <a:cs typeface="+mn-cs"/>
               </a:rPr>
-              <a:t>Турдуу пикирлер учун ыраазычылык билдиребиз.</a:t>
+              <a:t>Түрдүү пикирлер үчүн ыраазычылык билдиребиз.</a:t>
             </a:r>
           </a:p>
           <a:p>

--- a/media/resources/files/Onduktar_Akcha_Kabarchy.pptx
+++ b/media/resources/files/Onduktar_Akcha_Kabarchy.pptx
@@ -4049,7 +4049,7 @@
                 <a:ea typeface="+mn-ea"/>
                 <a:cs typeface="Arial" panose="020B0604020202020204" pitchFamily="34" charset="0"/>
               </a:rPr>
-              <a:t>Бул конкурстук иш-чарада бир окуучу </a:t>
+              <a:t>Бул жарышта бир окуучу</a:t>
             </a:r>
             <a:r>
               <a:rPr lang="en-US" sz="2000" dirty="0">
@@ -4076,7 +4076,7 @@
                 <a:ea typeface="+mn-ea"/>
                 <a:cs typeface="Arial" panose="020B0604020202020204" pitchFamily="34" charset="0"/>
               </a:rPr>
-              <a:t>2 же андан көп студенттен турган команданын кабарчысы болуп саналат.</a:t>
+              <a:t>2 же андан көп окуучудан турган команданын кабарчысы болот.</a:t>
             </a:r>
           </a:p>
           <a:p>
@@ -6141,7 +6141,7 @@
                   <a:prstClr val="black"/>
                 </a:solidFill>
               </a:rPr>
-              <a:t>Бир тилим 3.22 сом</a:t>
+              <a:t>Бир тилим 3,22 сом</a:t>
             </a:r>
           </a:p>
           <a:p>
@@ -9483,7 +9483,7 @@
                   <a:schemeClr val="tx1"/>
                 </a:solidFill>
               </a:rPr>
-              <a:t>10 транспортир 1.42сом</a:t>
+              <a:t>10 транспортир 1,42сом</a:t>
             </a:r>
             <a:endParaRPr lang="en-GB" sz="1950" dirty="0">
               <a:solidFill>
@@ -9552,7 +9552,7 @@
                   <a:schemeClr val="tx1"/>
                 </a:solidFill>
               </a:rPr>
-              <a:t>Арзан дукөн</a:t>
+              <a:t>Арзан дүкөн</a:t>
             </a:r>
           </a:p>
           <a:p>
@@ -9778,7 +9778,7 @@
                   <a:schemeClr val="tx1"/>
                 </a:solidFill>
               </a:rPr>
-              <a:t>15 сызгыч 2.37 сомго </a:t>
+              <a:t>15 сызгыч 2,37 сомго </a:t>
             </a:r>
             <a:endParaRPr lang="en-GB" sz="1950" dirty="0">
               <a:solidFill>
@@ -9847,7 +9847,7 @@
                   <a:schemeClr val="tx1"/>
                 </a:solidFill>
               </a:rPr>
-              <a:t>Арзан дукөн</a:t>
+              <a:t>Арзан дүкөн</a:t>
             </a:r>
           </a:p>
           <a:p>
@@ -9901,7 +9901,7 @@
                   <a:schemeClr val="tx1"/>
                 </a:solidFill>
               </a:rPr>
-              <a:t>4.55</a:t>
+              <a:t>4,55</a:t>
             </a:r>
             <a:r>
               <a:rPr lang="ky-KG" sz="1950" dirty="0">
@@ -9954,7 +9954,7 @@
                   <a:schemeClr val="tx1"/>
                 </a:solidFill>
               </a:rPr>
-              <a:t>Арзан дукөндөн </a:t>
+              <a:t>Арзан дүкөндөн </a:t>
             </a:r>
             <a:r>
               <a:rPr lang="en-GB" dirty="0"/>
@@ -12114,7 +12114,7 @@
                             <a:sysClr val="windowText" lastClr="000000"/>
                           </a:solidFill>
                         </a:rPr>
-                        <a:t>Бургер 2.49с </a:t>
+                        <a:t>Бургер 2,49с </a:t>
                       </a:r>
                       <a:endParaRPr lang="en-GB" b="0" dirty="0">
                         <a:solidFill>
@@ -12830,7 +12830,7 @@
                             <a:sysClr val="windowText" lastClr="000000"/>
                           </a:solidFill>
                         </a:rPr>
-                        <a:t>Бургер 2.49с </a:t>
+                        <a:t>Бургер 2,49с </a:t>
                       </a:r>
                       <a:endParaRPr lang="en-GB" b="0" dirty="0">
                         <a:solidFill>
@@ -14311,7 +14311,7 @@
                             <a:sysClr val="windowText" lastClr="000000"/>
                           </a:solidFill>
                         </a:rPr>
-                        <a:t>Бургер 2.49с </a:t>
+                        <a:t>Бургер 2,49с </a:t>
                       </a:r>
                       <a:endParaRPr lang="en-GB" b="0" dirty="0">
                         <a:solidFill>
@@ -15012,7 +15012,7 @@
                             <a:sysClr val="windowText" lastClr="000000"/>
                           </a:solidFill>
                         </a:rPr>
-                        <a:t>Бургер 2.49с </a:t>
+                        <a:t>Бургер 2,49с </a:t>
                       </a:r>
                       <a:endParaRPr lang="en-GB" b="0" dirty="0">
                         <a:solidFill>
@@ -16047,7 +16047,7 @@
                           <a:ea typeface="+mn-ea"/>
                           <a:cs typeface="+mn-cs"/>
                         </a:rPr>
-                        <a:t>2.91</a:t>
+                        <a:t>2,91</a:t>
                       </a:r>
                       <a:r>
                         <a:rPr kumimoji="0" lang="ky-KG" sz="3200" b="0" i="0" u="none" strike="noStrike" kern="1200" cap="none" spc="0" normalizeH="0" baseline="0" noProof="0" dirty="0">
@@ -16291,7 +16291,7 @@
                           <a:ea typeface="+mn-ea"/>
                           <a:cs typeface="+mn-cs"/>
                         </a:rPr>
-                        <a:t>3.15</a:t>
+                        <a:t>3,15</a:t>
                       </a:r>
                       <a:r>
                         <a:rPr kumimoji="0" lang="ky-KG" sz="3200" b="0" i="0" u="none" strike="noStrike" kern="1200" cap="none" spc="0" normalizeH="0" baseline="0" noProof="0" dirty="0">
@@ -16532,7 +16532,7 @@
                           <a:ea typeface="+mn-ea"/>
                           <a:cs typeface="+mn-cs"/>
                         </a:rPr>
-                        <a:t>23.55</a:t>
+                        <a:t>23,55</a:t>
                       </a:r>
                       <a:r>
                         <a:rPr kumimoji="0" lang="ky-KG" sz="3200" b="0" i="0" u="none" strike="noStrike" kern="1200" cap="none" spc="0" normalizeH="0" baseline="0" noProof="0" dirty="0">
@@ -16803,7 +16803,7 @@
                           <a:ea typeface="+mn-ea"/>
                           <a:cs typeface="+mn-cs"/>
                         </a:rPr>
-                        <a:t>21.91</a:t>
+                        <a:t>21,91</a:t>
                       </a:r>
                       <a:r>
                         <a:rPr kumimoji="0" lang="ky-KG" sz="3200" b="0" i="0" u="none" strike="noStrike" kern="1200" cap="none" spc="0" normalizeH="0" baseline="0" noProof="0" dirty="0">
@@ -17074,7 +17074,7 @@
                           <a:ea typeface="+mn-ea"/>
                           <a:cs typeface="+mn-cs"/>
                         </a:rPr>
-                        <a:t>63.36</a:t>
+                        <a:t>63,36</a:t>
                       </a:r>
                       <a:r>
                         <a:rPr kumimoji="0" lang="ky-KG" sz="3200" b="0" i="0" u="none" strike="noStrike" kern="1200" cap="none" spc="0" normalizeH="0" baseline="0" noProof="0" dirty="0">
@@ -17329,7 +17329,7 @@
                           <a:ea typeface="+mn-ea"/>
                           <a:cs typeface="+mn-cs"/>
                         </a:rPr>
-                        <a:t>34.65</a:t>
+                        <a:t>34,65</a:t>
                       </a:r>
                       <a:r>
                         <a:rPr kumimoji="0" lang="ky-KG" sz="3200" b="0" i="0" u="none" strike="noStrike" kern="1200" cap="none" spc="0" normalizeH="0" baseline="0" noProof="0" dirty="0">
@@ -17584,7 +17584,7 @@
                           <a:ea typeface="+mn-ea"/>
                           <a:cs typeface="+mn-cs"/>
                         </a:rPr>
-                        <a:t>1.22</a:t>
+                        <a:t>1,22</a:t>
                       </a:r>
                       <a:r>
                         <a:rPr kumimoji="0" lang="ky-KG" sz="3200" b="0" i="0" u="none" strike="noStrike" kern="1200" cap="none" spc="0" normalizeH="0" baseline="0" noProof="0" dirty="0">
@@ -17825,7 +17825,7 @@
                           <a:ea typeface="+mn-ea"/>
                           <a:cs typeface="+mn-cs"/>
                         </a:rPr>
-                        <a:t>12.33</a:t>
+                        <a:t>12,33</a:t>
                       </a:r>
                       <a:r>
                         <a:rPr kumimoji="0" lang="ky-KG" sz="3200" b="0" i="0" u="none" strike="noStrike" kern="1200" cap="none" spc="0" normalizeH="0" baseline="0" noProof="0" dirty="0">
@@ -18564,7 +18564,7 @@
                           <a:ea typeface="+mn-ea"/>
                           <a:cs typeface="+mn-cs"/>
                         </a:rPr>
-                        <a:t>43.84</a:t>
+                        <a:t>43,84</a:t>
                       </a:r>
                       <a:r>
                         <a:rPr kumimoji="0" lang="ky-KG" sz="3200" b="0" i="0" u="none" strike="noStrike" kern="1200" cap="none" spc="0" normalizeH="0" baseline="0" noProof="0" dirty="0">
@@ -18805,7 +18805,7 @@
                           <a:ea typeface="+mn-ea"/>
                           <a:cs typeface="+mn-cs"/>
                         </a:rPr>
-                        <a:t>66.10</a:t>
+                        <a:t>66,10</a:t>
                       </a:r>
                       <a:r>
                         <a:rPr kumimoji="0" lang="ky-KG" sz="3200" b="0" i="0" u="none" strike="noStrike" kern="1200" cap="none" spc="0" normalizeH="0" baseline="0" noProof="0" dirty="0">
@@ -19046,7 +19046,7 @@
                           <a:ea typeface="+mn-ea"/>
                           <a:cs typeface="+mn-cs"/>
                         </a:rPr>
-                        <a:t>22.54</a:t>
+                        <a:t>22,54</a:t>
                       </a:r>
                       <a:r>
                         <a:rPr kumimoji="0" lang="ky-KG" sz="3200" b="0" i="0" u="none" strike="noStrike" kern="1200" cap="none" spc="0" normalizeH="0" baseline="0" noProof="0" dirty="0">
@@ -19565,7 +19565,7 @@
                           <a:ea typeface="+mn-ea"/>
                           <a:cs typeface="+mn-cs"/>
                         </a:rPr>
-                        <a:t>27.46</a:t>
+                        <a:t>27,46</a:t>
                       </a:r>
                       <a:r>
                         <a:rPr kumimoji="0" lang="ky-KG" sz="3200" b="0" i="0" u="none" strike="noStrike" kern="1200" cap="none" spc="0" normalizeH="0" baseline="0" noProof="0" dirty="0">
@@ -19809,7 +19809,7 @@
                           <a:ea typeface="+mn-ea"/>
                           <a:cs typeface="+mn-cs"/>
                         </a:rPr>
-                        <a:t>4.34</a:t>
+                        <a:t>4,34</a:t>
                       </a:r>
                       <a:r>
                         <a:rPr kumimoji="0" lang="ky-KG" sz="3200" b="0" i="0" u="none" strike="noStrike" kern="1200" cap="none" spc="0" normalizeH="0" baseline="0" noProof="0" dirty="0">
@@ -20050,7 +20050,7 @@
                           <a:ea typeface="+mn-ea"/>
                           <a:cs typeface="+mn-cs"/>
                         </a:rPr>
-                        <a:t>7.68</a:t>
+                        <a:t>7,68</a:t>
                       </a:r>
                       <a:r>
                         <a:rPr kumimoji="0" lang="ky-KG" sz="3200" b="0" i="0" u="none" strike="noStrike" kern="1200" cap="none" spc="0" normalizeH="0" baseline="0" noProof="0" dirty="0">
@@ -20307,7 +20307,7 @@
                           <a:ea typeface="+mn-ea"/>
                           <a:cs typeface="+mn-cs"/>
                         </a:rPr>
-                        <a:t>8.26</a:t>
+                        <a:t>8,26</a:t>
                       </a:r>
                       <a:r>
                         <a:rPr kumimoji="0" lang="ky-KG" sz="3200" b="0" i="0" u="none" strike="noStrike" kern="1200" cap="none" spc="0" normalizeH="0" baseline="0" noProof="0" dirty="0">
@@ -20564,7 +20564,7 @@
                           <a:ea typeface="+mn-ea"/>
                           <a:cs typeface="+mn-cs"/>
                         </a:rPr>
-                        <a:t>9.46</a:t>
+                        <a:t>9,46</a:t>
                       </a:r>
                       <a:r>
                         <a:rPr kumimoji="0" lang="ky-KG" sz="3200" b="0" i="0" u="none" strike="noStrike" kern="1200" cap="none" spc="0" normalizeH="0" baseline="0" noProof="0" dirty="0">
@@ -21490,7 +21490,7 @@
                           <a:ea typeface="+mn-ea"/>
                           <a:cs typeface="+mn-cs"/>
                         </a:rPr>
-                        <a:t>2.58</a:t>
+                        <a:t>2,58</a:t>
                       </a:r>
                       <a:r>
                         <a:rPr kumimoji="0" lang="ky-KG" sz="3200" b="0" i="0" u="none" strike="noStrike" kern="1200" cap="none" spc="0" normalizeH="0" baseline="0" noProof="0" dirty="0">
@@ -21731,7 +21731,7 @@
                           <a:ea typeface="+mn-ea"/>
                           <a:cs typeface="+mn-cs"/>
                         </a:rPr>
-                        <a:t>3.76</a:t>
+                        <a:t>3,76</a:t>
                       </a:r>
                       <a:r>
                         <a:rPr kumimoji="0" lang="ky-KG" sz="3200" b="0" i="0" u="none" strike="noStrike" kern="1200" cap="none" spc="0" normalizeH="0" baseline="0" noProof="0" dirty="0">
@@ -21972,7 +21972,7 @@
                           <a:ea typeface="+mn-ea"/>
                           <a:cs typeface="+mn-cs"/>
                         </a:rPr>
-                        <a:t>4.88</a:t>
+                        <a:t>4,88</a:t>
                       </a:r>
                       <a:r>
                         <a:rPr kumimoji="0" lang="ky-KG" sz="3200" b="0" i="0" u="none" strike="noStrike" kern="1200" cap="none" spc="0" normalizeH="0" baseline="0" noProof="0" dirty="0">
@@ -22454,7 +22454,7 @@
                           <a:ea typeface="+mn-ea"/>
                           <a:cs typeface="+mn-cs"/>
                         </a:rPr>
-                        <a:t>2.61</a:t>
+                        <a:t>2,61</a:t>
                       </a:r>
                       <a:r>
                         <a:rPr kumimoji="0" lang="ky-KG" sz="3200" b="0" i="0" u="none" strike="noStrike" kern="1200" cap="none" spc="0" normalizeH="0" baseline="0" noProof="0" dirty="0">
@@ -28850,7 +28850,7 @@
                 <a:ea typeface="+mn-ea"/>
                 <a:cs typeface="Arial" panose="020B0604020202020204" pitchFamily="34" charset="0"/>
               </a:rPr>
-              <a:t>Упайлар системасы менен студенттер тиешелүү суроолорго аракет кыла алышат.</a:t>
+              <a:t>Упайына жараша окуучулар суроо тандап жооп бере алышат.</a:t>
             </a:r>
           </a:p>
           <a:p>
@@ -33066,7 +33066,7 @@
             <a:pPr algn="ctr"/>
             <a:r>
               <a:rPr lang="en-GB" sz="3200" dirty="0"/>
-              <a:t>4.71</a:t>
+              <a:t>4,71</a:t>
             </a:r>
             <a:r>
               <a:rPr lang="ky-KG" sz="3200" dirty="0"/>
@@ -33205,7 +33205,7 @@
             <a:pPr algn="ctr"/>
             <a:r>
               <a:rPr lang="en-GB" sz="3200" dirty="0"/>
-              <a:t>3.13</a:t>
+              <a:t>3,13</a:t>
             </a:r>
             <a:r>
               <a:rPr lang="ky-KG" sz="3200" dirty="0"/>
@@ -34081,7 +34081,7 @@
             <a:pPr algn="ctr"/>
             <a:r>
               <a:rPr lang="en-GB" sz="3200" dirty="0"/>
-              <a:t>5.28</a:t>
+              <a:t>5,28</a:t>
             </a:r>
             <a:r>
               <a:rPr lang="ky-KG" sz="3200" dirty="0"/>
@@ -34220,7 +34220,7 @@
             <a:pPr algn="ctr"/>
             <a:r>
               <a:rPr lang="en-GB" sz="3200" dirty="0"/>
-              <a:t>2.31</a:t>
+              <a:t>2,31</a:t>
             </a:r>
             <a:r>
               <a:rPr lang="ky-KG" sz="3200" dirty="0"/>
@@ -35784,7 +35784,7 @@
             <a:pPr algn="ctr"/>
             <a:r>
               <a:rPr lang="ky-KG" dirty="0"/>
-              <a:t>4.56 сом өзгөртүү алат.</a:t>
+              <a:t>4,56 сом өзгөртүү алат.</a:t>
             </a:r>
           </a:p>
           <a:p>
@@ -35847,7 +35847,7 @@
             </a:r>
             <a:r>
               <a:rPr lang="en-US" dirty="0"/>
-              <a:t>c</a:t>
+              <a:t>с</a:t>
             </a:r>
             <a:r>
               <a:rPr lang="ky-KG" dirty="0"/>
